--- a/ibm_pp.pptx
+++ b/ibm_pp.pptx
@@ -14603,63 +14603,53 @@
           <a:lstStyle/>
           <a:p>
             <a:r>
-              <a:rPr dirty="0"/>
               <a:t>GitHub Repository &amp; Live App Links:</a:t>
             </a:r>
           </a:p>
-          <a:p>
-            <a:endParaRPr dirty="0"/>
-          </a:p>
+          <a:p/>
           <a:p>
             <a:r>
-              <a:rPr dirty="0"/>
               <a:t>• GitHub Public Repository:</a:t>
             </a:r>
-            <a:endParaRPr lang="en-GB" dirty="0"/>
-          </a:p>
-          <a:p>
-            <a:endParaRPr dirty="0"/>
-          </a:p>
+          </a:p>
+          <a:p/>
           <a:p>
             <a:r>
-              <a:rPr sz="2000" b="1" dirty="0"/>
               <a:t>https://github.com/ADAPAUMA/AI-LaTeX-TikZ-Studio</a:t>
             </a:r>
           </a:p>
-          <a:p>
-            <a:endParaRPr dirty="0"/>
-          </a:p>
+          <a:p/>
           <a:p>
             <a:r>
-              <a:rPr dirty="0"/>
-              <a:t>• Live </a:t>
+              <a:t>• Live Streamlit App URL:</a:t>
             </a:r>
+          </a:p>
+          <a:p/>
+          <a:p>
             <a:r>
-              <a:rPr dirty="0" err="1"/>
-              <a:t>Streamlit</a:t>
-            </a:r>
-            <a:r>
-              <a:rPr dirty="0"/>
-              <a:t> App URL:</a:t>
-            </a:r>
-            <a:endParaRPr lang="en-GB" dirty="0"/>
-          </a:p>
-          <a:p>
-            <a:endParaRPr lang="en-GB" dirty="0"/>
-          </a:p>
-          <a:p>
-            <a:r>
-              <a:rPr lang="en-IN" sz="2000" b="1" dirty="0"/>
               <a:t>https://adapauma-tikz-studio.streamlit.app/</a:t>
             </a:r>
           </a:p>
-          <a:p>
-            <a:endParaRPr dirty="0"/>
-          </a:p>
+          <a:p/>
           <a:p>
             <a:r>
-              <a:rPr dirty="0"/>
               <a:t>Repository includes complete source code: app.py, auth.py, tikz_generator.py, granite_client.py, validator.py, renderer.py, prompt_templates.py, requirements.txt, and submission documentation.</a:t>
+            </a:r>
+          </a:p>
+          <a:p/>
+          <a:p>
+            <a:r>
+              <a:t>• IBM Watson Assistant Integration:</a:t>
+            </a:r>
+          </a:p>
+          <a:p>
+            <a:r>
+              <a:t>Integration ID: bad150a7-6816-40db-9249-10be96c432f4</a:t>
+            </a:r>
+          </a:p>
+          <a:p>
+            <a:r>
+              <a:t>Region: au-syd</a:t>
             </a:r>
           </a:p>
         </p:txBody>
@@ -16719,161 +16709,50 @@
           <a:lstStyle/>
           <a:p>
             <a:r>
-              <a:rPr dirty="0"/>
-              <a:t>Proposed Solution: AI-Powered LaTeX </a:t>
+              <a:t>Proposed Solution: AI-Powered LaTeX TikZ Diagram Generator &amp; Chatbot Studio</a:t>
             </a:r>
+          </a:p>
+          <a:p/>
+          <a:p>
             <a:r>
-              <a:rPr dirty="0" err="1"/>
-              <a:t>TikZ</a:t>
+              <a:t>The proposed solution is a multi-agent AI studio powered by IBM Bob, IBM watsonx.ai, and IBM Granite Models (ibm/granite-13b-instruct-v2) that generates, validates, and renders publication-ready LaTeX TikZ code from plain English prompts.</a:t>
             </a:r>
+          </a:p>
+          <a:p/>
+          <a:p>
             <a:r>
-              <a:rPr dirty="0"/>
-              <a:t> Diagram Generator &amp; Chatbot Studio</a:t>
-            </a:r>
-          </a:p>
-          <a:p>
-            <a:endParaRPr dirty="0"/>
-          </a:p>
-          <a:p>
-            <a:r>
-              <a:rPr dirty="0"/>
-              <a:t>The proposed solution is a multi-agent AI studio powered by IBM Bob, IBM watsonx.ai, and IBM Granite Models (</a:t>
-            </a:r>
-            <a:r>
-              <a:rPr dirty="0" err="1"/>
-              <a:t>ibm</a:t>
-            </a:r>
-            <a:r>
-              <a:rPr dirty="0"/>
-              <a:t>/granite-13b-instruct-v2) that generates, validates, and renders publication-ready LaTeX </a:t>
-            </a:r>
-            <a:r>
-              <a:rPr dirty="0" err="1"/>
-              <a:t>TikZ</a:t>
-            </a:r>
-            <a:r>
-              <a:rPr dirty="0"/>
-              <a:t> code from plain English prompts.</a:t>
-            </a:r>
-          </a:p>
-          <a:p>
-            <a:endParaRPr dirty="0"/>
-          </a:p>
-          <a:p>
-            <a:r>
-              <a:rPr dirty="0"/>
               <a:t>The system uses an autonomous multi-agent architecture coordinated via IBM Bob workflows:</a:t>
             </a:r>
           </a:p>
           <a:p>
             <a:r>
-              <a:rPr dirty="0"/>
-              <a:t>1. AI Chatbot Studio Agent – Engages in natural dialogue using </a:t>
+              <a:t>1. IBM Watson Assistant &amp; AI Chatbot Agent – Engages in natural dialogue via IBM Watson Assistant WebChat (Integration: bad150a7-6816-40db-9249-10be96c432f4) and Streamlit AI Chat Studio to understand user intent, generate TikZ diagrams, and apply context-aware edits.</a:t>
             </a:r>
+          </a:p>
+          <a:p>
             <a:r>
-              <a:rPr dirty="0" err="1"/>
-              <a:t>Streamlit</a:t>
+              <a:t>2. TikZ Generator &amp; Synthesis Agent – Prompts IBM Granite 13B to produce standalone, compilable LaTeX TikZ documents wrapped with appropriate document classes and libraries.</a:t>
             </a:r>
+          </a:p>
+          <a:p>
             <a:r>
-              <a:rPr dirty="0"/>
-              <a:t> </a:t>
+              <a:t>3. Syntax Validation &amp; Auto-Correction Agent – Evaluates generated TikZ code against strict syntax rules (matching braces, valid node paths, missing packages) and triggers automatic correction passes if errors are detected.</a:t>
             </a:r>
+          </a:p>
+          <a:p>
             <a:r>
-              <a:rPr dirty="0" err="1"/>
-              <a:t>st.chat_message</a:t>
-            </a:r>
-            <a:r>
-              <a:rPr dirty="0"/>
-              <a:t> to understand user intent, generate </a:t>
-            </a:r>
-            <a:r>
-              <a:rPr dirty="0" err="1"/>
-              <a:t>TikZ</a:t>
-            </a:r>
-            <a:r>
-              <a:rPr dirty="0"/>
-              <a:t> diagrams, and apply context-aware edits.</a:t>
-            </a:r>
-          </a:p>
-          <a:p>
-            <a:r>
-              <a:rPr dirty="0"/>
-              <a:t>2. </a:t>
-            </a:r>
-            <a:r>
-              <a:rPr dirty="0" err="1"/>
-              <a:t>TikZ</a:t>
-            </a:r>
-            <a:r>
-              <a:rPr dirty="0"/>
-              <a:t> Generator &amp; Synthesis Agent – Prompts IBM Granite 13B to produce standalone, </a:t>
-            </a:r>
-            <a:r>
-              <a:rPr dirty="0" err="1"/>
-              <a:t>compilable</a:t>
-            </a:r>
-            <a:r>
-              <a:rPr dirty="0"/>
-              <a:t> LaTeX </a:t>
-            </a:r>
-            <a:r>
-              <a:rPr dirty="0" err="1"/>
-              <a:t>TikZ</a:t>
-            </a:r>
-            <a:r>
-              <a:rPr dirty="0"/>
-              <a:t> documents wrapped with appropriate document classes and libraries.</a:t>
-            </a:r>
-          </a:p>
-          <a:p>
-            <a:r>
-              <a:rPr dirty="0"/>
-              <a:t>3. Syntax Validation &amp; Auto-Correction Agent – Evaluates generated </a:t>
-            </a:r>
-            <a:r>
-              <a:rPr dirty="0" err="1"/>
-              <a:t>TikZ</a:t>
-            </a:r>
-            <a:r>
-              <a:rPr dirty="0"/>
-              <a:t> code against strict syntax rules (matching braces, valid node paths, missing packages) and triggers automatic correction passes if errors are detected.</a:t>
-            </a:r>
-          </a:p>
-          <a:p>
-            <a:r>
-              <a:rPr dirty="0"/>
               <a:t>4. Smart Fallback Engine – Provides offline rule-based diagram synthesis for ML pipelines, CNNs, Transformers, microservices, and state machines, guaranteeing zero-downtime reliability.</a:t>
             </a:r>
           </a:p>
           <a:p>
             <a:r>
-              <a:rPr dirty="0"/>
-              <a:t>5. Interactive Web Studio – Built with </a:t>
+              <a:t>5. Interactive Web Studio – Built with Streamlit, featuring a 5-tab layout (Chatbot, Generator &amp; Editor, Template Gallery, Validator, History) with instant PDF/SVG preview rendering.</a:t>
             </a:r>
+          </a:p>
+          <a:p/>
+          <a:p>
             <a:r>
-              <a:rPr dirty="0" err="1"/>
-              <a:t>Streamlit</a:t>
-            </a:r>
-            <a:r>
-              <a:rPr dirty="0"/>
-              <a:t>, featuring a 5-tab layout (Chatbot, Generator &amp; Editor, Template Gallery, Validator, History) with instant PDF/SVG preview rendering.</a:t>
-            </a:r>
-          </a:p>
-          <a:p>
-            <a:endParaRPr dirty="0"/>
-          </a:p>
-          <a:p>
-            <a:r>
-              <a:rPr dirty="0"/>
-              <a:t>By combining Agentic AI reasoning with live validation and preview tools, the solution eliminates </a:t>
-            </a:r>
-            <a:r>
-              <a:rPr dirty="0" err="1"/>
-              <a:t>TikZ</a:t>
-            </a:r>
-            <a:r>
-              <a:rPr dirty="0"/>
-              <a:t> coding friction for researchers worldwide.</a:t>
+              <a:t>By combining Agentic AI reasoning with live validation and preview tools, the solution eliminates TikZ coding friction for researchers worldwide.</a:t>
             </a:r>
           </a:p>
         </p:txBody>
@@ -17058,7 +16937,8 @@
           <a:p>
             <a:r>
               <a:rPr dirty="0"/>
-              <a:t>IBM watsonx.ai REST API – Handles model inference, token management, and scalable cloud execution.</a:t>
+              <a:t>IBM watsonx.ai REST API – Handles model inference, token management, and scalable cloud execution.
+- IBM Watson Assistant WebChat &amp; NLU Integration (Integration ID: bad150a7-6816-40db-9249-10be96c432f4, Region: au-syd).</a:t>
             </a:r>
           </a:p>
           <a:p>

--- a/ibm_pp.pptx
+++ b/ibm_pp.pptx
@@ -14652,6 +14652,22 @@
               <a:t>Region: au-syd</a:t>
             </a:r>
           </a:p>
+          <a:p/>
+          <a:p>
+            <a:r>
+              <a:t>• IBM Watson Assistant Integration:</a:t>
+            </a:r>
+          </a:p>
+          <a:p>
+            <a:r>
+              <a:t>Integration ID: bad150a7-6816-40db-9249-10be96c432f4</a:t>
+            </a:r>
+          </a:p>
+          <a:p>
+            <a:r>
+              <a:t>Region: au-syd</a:t>
+            </a:r>
+          </a:p>
         </p:txBody>
       </p:sp>
       <p:sp>
@@ -17748,28 +17764,22 @@
       </p:sp>
       <p:pic>
         <p:nvPicPr>
-          <p:cNvPr id="5" name="Picture 4">
-            <a:extLst>
-              <a:ext uri="{FF2B5EF4-FFF2-40B4-BE49-F238E27FC236}">
-                <a16:creationId xmlns:a16="http://schemas.microsoft.com/office/drawing/2014/main" id="{6697535D-EBF5-41DE-E93B-760133BF95C6}"/>
-              </a:ext>
-            </a:extLst>
-          </p:cNvPr>
+          <p:cNvPr id="3" name="Picture 2" descr="architecture_diagram.jpg"/>
           <p:cNvPicPr>
             <a:picLocks noChangeAspect="1"/>
           </p:cNvPicPr>
           <p:nvPr/>
         </p:nvPicPr>
         <p:blipFill>
-          <a:blip r:embed="rId3"/>
+          <a:blip r:embed="rId4"/>
           <a:stretch>
             <a:fillRect/>
           </a:stretch>
         </p:blipFill>
         <p:spPr>
           <a:xfrm>
-            <a:off x="537589" y="1053082"/>
-            <a:ext cx="11314999" cy="5195318"/>
+            <a:off x="914400" y="1828800"/>
+            <a:ext cx="7315200" cy="4082902"/>
           </a:xfrm>
           <a:prstGeom prst="rect">
             <a:avLst/>
